--- a/examples/ppt169_pritzker_2026_quick/exports/pritzker_2026_quick.pptx
+++ b/examples/ppt169_pritzker_2026_quick/exports/pritzker_2026_quick.pptx
@@ -1093,7 +1093,7 @@
 
 <file path=ppt/slideLayouts/slideLayout7.xml><?xml version="1.0" encoding="utf-8"?>
 <p:sldLayout xmlns:a="http://schemas.openxmlformats.org/drawingml/2006/main" xmlns:p="http://schemas.openxmlformats.org/presentationml/2006/main" type="blank" preserve="1">
-  <p:cSld name="ppt169_pritzker_2026 — Blank">
+  <p:cSld name="ppt169_pritzker_2026_quick — Blank">
     <p:spTree>
       <p:nvGrpSpPr>
         <p:cNvPr id="1" name=""/>
@@ -1183,7 +1183,7 @@
 
 <file path=ppt/slideMasters/slideMaster1.xml><?xml version="1.0" encoding="utf-8"?>
 <p:sldMaster xmlns:a="http://schemas.openxmlformats.org/drawingml/2006/main" xmlns:p="http://schemas.openxmlformats.org/presentationml/2006/main" xmlns:r="http://schemas.openxmlformats.org/officeDocument/2006/relationships">
-  <p:cSld name="ppt169_pritzker_2026 — Master">
+  <p:cSld name="ppt169_pritzker_2026_quick — Master">
     <p:bg>
       <p:bgRef idx="1001">
         <a:schemeClr val="bg1"/>
@@ -30022,9 +30022,9 @@
 </file>
 
 <file path=ppt/theme/theme1.xml><?xml version="1.0" encoding="utf-8"?>
-<a:theme xmlns:a="http://schemas.openxmlformats.org/drawingml/2006/main" name="ppt169_pritzker_2026">
+<a:theme xmlns:a="http://schemas.openxmlformats.org/drawingml/2006/main" name="ppt169_pritzker_2026_quick">
   <a:themeElements>
-    <a:clrScheme name="ppt169_pritzker_2026">
+    <a:clrScheme name="ppt169_pritzker_2026_quick">
       <a:dk1>
         <a:sysClr val="windowText" lastClr="000000"/>
       </a:dk1>
@@ -30062,7 +30062,7 @@
         <a:srgbClr val="800080"/>
       </a:folHlink>
     </a:clrScheme>
-    <a:fontScheme name="ppt169_pritzker_2026">
+    <a:fontScheme name="ppt169_pritzker_2026_quick">
       <a:majorFont>
         <a:latin typeface="Calibri"/>
         <a:ea typeface=""/>
@@ -30134,7 +30134,7 @@
         <a:font script="Geor" typeface="Sylfaen"/>
       </a:minorFont>
     </a:fontScheme>
-    <a:fmtScheme name="ppt169_pritzker_2026">
+    <a:fmtScheme name="ppt169_pritzker_2026_quick">
       <a:fillStyleLst>
         <a:solidFill>
           <a:schemeClr val="phClr"/>
@@ -30342,9 +30342,9 @@
 </file>
 
 <file path=ppt/theme/theme2.xml><?xml version="1.0" encoding="utf-8"?>
-<a:theme xmlns:a="http://schemas.openxmlformats.org/drawingml/2006/main" name="ppt169_pritzker_2026">
+<a:theme xmlns:a="http://schemas.openxmlformats.org/drawingml/2006/main" name="ppt169_pritzker_2026_quick">
   <a:themeElements>
-    <a:clrScheme name="ppt169_pritzker_2026">
+    <a:clrScheme name="ppt169_pritzker_2026_quick">
       <a:dk1>
         <a:sysClr val="windowText" lastClr="000000"/>
       </a:dk1>
@@ -30382,7 +30382,7 @@
         <a:srgbClr val="800080"/>
       </a:folHlink>
     </a:clrScheme>
-    <a:fontScheme name="ppt169_pritzker_2026">
+    <a:fontScheme name="ppt169_pritzker_2026_quick">
       <a:majorFont>
         <a:latin typeface="Calibri"/>
         <a:ea typeface=""/>
@@ -30454,7 +30454,7 @@
         <a:font script="Geor" typeface="Sylfaen"/>
       </a:minorFont>
     </a:fontScheme>
-    <a:fmtScheme name="ppt169_pritzker_2026">
+    <a:fmtScheme name="ppt169_pritzker_2026_quick">
       <a:fillStyleLst>
         <a:solidFill>
           <a:schemeClr val="phClr"/>
